--- a/Fase 2/Evidencias Proyecto/Evidencias de documentación/Arquitectura C4 RehabControl.pptx
+++ b/Fase 2/Evidencias Proyecto/Evidencias de documentación/Arquitectura C4 RehabControl.pptx
@@ -3207,7 +3207,7 @@
 <p:tagLst xmlns:p="http://schemas.openxmlformats.org/presentationml/2006/main" xmlns:a="http://schemas.openxmlformats.org/drawingml/2006/main" xmlns:r="http://schemas.openxmlformats.org/officeDocument/2006/relationships">
   <p:tag name="LUCID-SOURCE" val="5aBWq6WjY-SQ"/>
   <p:tag name="LUCID-DOCUMENT" val="bf5eb55f-c482-41f5-8917-9d0749890f41"/>
-  <p:tag name="LUCID-UPDATE-TIME" val="1778655502507"/>
+  <p:tag name="LUCID-UPDATE-TIME" val="1778726030284"/>
 </p:tagLst>
 </file>
 
@@ -3215,7 +3215,7 @@
 <p:tagLst xmlns:p="http://schemas.openxmlformats.org/presentationml/2006/main" xmlns:a="http://schemas.openxmlformats.org/drawingml/2006/main" xmlns:r="http://schemas.openxmlformats.org/officeDocument/2006/relationships">
   <p:tag name="LUCID-SOURCE" val="PNUWm3sP01k3"/>
   <p:tag name="LUCID-DOCUMENT" val="bf5eb55f-c482-41f5-8917-9d0749890f41"/>
-  <p:tag name="LUCID-UPDATE-TIME" val="1778655502507"/>
+  <p:tag name="LUCID-UPDATE-TIME" val="1778726030284"/>
 </p:tagLst>
 </file>
 
@@ -3223,7 +3223,7 @@
 <p:tagLst xmlns:p="http://schemas.openxmlformats.org/presentationml/2006/main" xmlns:a="http://schemas.openxmlformats.org/drawingml/2006/main" xmlns:r="http://schemas.openxmlformats.org/officeDocument/2006/relationships">
   <p:tag name="LUCID-SOURCE" val="qPUWvaa77Oo1"/>
   <p:tag name="LUCID-DOCUMENT" val="bf5eb55f-c482-41f5-8917-9d0749890f41"/>
-  <p:tag name="LUCID-UPDATE-TIME" val="1778655502507"/>
+  <p:tag name="LUCID-UPDATE-TIME" val="1778726030284"/>
 </p:tagLst>
 </file>
 
